--- a/2026_BePa_Winter_School/bepa2026_stats.pptx
+++ b/2026_BePa_Winter_School/bepa2026_stats.pptx
@@ -13,8 +13,8 @@
     <p:sldId id="278" r:id="rId4"/>
     <p:sldId id="258" r:id="rId5"/>
     <p:sldId id="259" r:id="rId6"/>
-    <p:sldId id="260" r:id="rId7"/>
-    <p:sldId id="261" r:id="rId8"/>
+    <p:sldId id="261" r:id="rId7"/>
+    <p:sldId id="260" r:id="rId8"/>
     <p:sldId id="262" r:id="rId9"/>
     <p:sldId id="263" r:id="rId10"/>
     <p:sldId id="264" r:id="rId11"/>
@@ -6038,7 +6038,7 @@
         </p:blipFill>
         <p:spPr>
           <a:xfrm>
-            <a:off x="0" y="0"/>
+            <a:off x="32175" y="-23171"/>
             <a:ext cx="9144000" cy="5143500"/>
           </a:xfrm>
           <a:prstGeom prst="rect">
@@ -6178,8 +6178,8 @@
         </p:nvSpPr>
         <p:spPr>
           <a:xfrm>
-            <a:off x="942501" y="1725216"/>
-            <a:ext cx="1772571" cy="623292"/>
+            <a:off x="606246" y="1725216"/>
+            <a:ext cx="2445093" cy="600614"/>
           </a:xfrm>
           <a:prstGeom prst="rect">
             <a:avLst/>
@@ -6200,14 +6200,30 @@
               <a:buNone/>
             </a:pPr>
             <a:r>
-              <a:rPr lang="en-US" sz="3504" i="1" dirty="0">
+              <a:rPr lang="en-US" sz="2400" i="1" dirty="0">
                 <a:solidFill>
                   <a:srgbClr val="FFFFFF"/>
                 </a:solidFill>
               </a:rPr>
-              <a:t>P(H|D) =</a:t>
-            </a:r>
-            <a:endParaRPr lang="en-US" sz="3504" dirty="0"/>
+              <a:t>P(</a:t>
+            </a:r>
+            <a:r>
+              <a:rPr lang="en-US" sz="2400" i="1" dirty="0" err="1">
+                <a:solidFill>
+                  <a:srgbClr val="FFFFFF"/>
+                </a:solidFill>
+              </a:rPr>
+              <a:t>target|positive</a:t>
+            </a:r>
+            <a:r>
+              <a:rPr lang="en-US" sz="2400" i="1" dirty="0">
+                <a:solidFill>
+                  <a:srgbClr val="FFFFFF"/>
+                </a:solidFill>
+              </a:rPr>
+              <a:t>) =</a:t>
+            </a:r>
+            <a:endParaRPr lang="en-US" sz="2400" dirty="0"/>
           </a:p>
         </p:txBody>
       </p:sp>
@@ -6219,8 +6235,8 @@
         </p:nvSpPr>
         <p:spPr>
           <a:xfrm>
-            <a:off x="655606" y="2380655"/>
-            <a:ext cx="2346359" cy="742950"/>
+            <a:off x="125888" y="2380655"/>
+            <a:ext cx="3405805" cy="643574"/>
           </a:xfrm>
           <a:prstGeom prst="rect">
             <a:avLst/>
@@ -6241,14 +6257,30 @@
               <a:buNone/>
             </a:pPr>
             <a:r>
-              <a:rPr lang="en-US" sz="3504" i="1" dirty="0">
+              <a:rPr lang="en-US" sz="2400" i="1" dirty="0">
                 <a:solidFill>
                   <a:srgbClr val="FFFFFF"/>
                 </a:solidFill>
               </a:rPr>
-              <a:t>P(D|H) P(H)</a:t>
-            </a:r>
-            <a:endParaRPr lang="en-US" sz="3504" dirty="0"/>
+              <a:t>P(</a:t>
+            </a:r>
+            <a:r>
+              <a:rPr lang="en-US" sz="2400" i="1" dirty="0" err="1">
+                <a:solidFill>
+                  <a:srgbClr val="FFFFFF"/>
+                </a:solidFill>
+              </a:rPr>
+              <a:t>positive|target</a:t>
+            </a:r>
+            <a:r>
+              <a:rPr lang="en-US" sz="2400" i="1" dirty="0">
+                <a:solidFill>
+                  <a:srgbClr val="FFFFFF"/>
+                </a:solidFill>
+              </a:rPr>
+              <a:t>) P(target)</a:t>
+            </a:r>
+            <a:endParaRPr lang="en-US" sz="2400" dirty="0"/>
           </a:p>
         </p:txBody>
       </p:sp>
@@ -6260,8 +6292,8 @@
         </p:nvSpPr>
         <p:spPr>
           <a:xfrm>
-            <a:off x="655606" y="3123605"/>
-            <a:ext cx="2346359" cy="721519"/>
+            <a:off x="1027636" y="2958425"/>
+            <a:ext cx="1311256" cy="643574"/>
           </a:xfrm>
           <a:prstGeom prst="rect">
             <a:avLst/>
@@ -6282,14 +6314,14 @@
               <a:buNone/>
             </a:pPr>
             <a:r>
-              <a:rPr lang="en-US" sz="3504" i="1" dirty="0">
+              <a:rPr lang="en-US" sz="2400" i="1" dirty="0">
                 <a:solidFill>
                   <a:srgbClr val="FFFFFF"/>
                 </a:solidFill>
               </a:rPr>
-              <a:t>P(D)</a:t>
-            </a:r>
-            <a:endParaRPr lang="en-US" sz="3504" dirty="0"/>
+              <a:t>P(positive)</a:t>
+            </a:r>
+            <a:endParaRPr lang="en-US" sz="2400" dirty="0"/>
           </a:p>
         </p:txBody>
       </p:sp>
@@ -6344,8 +6376,8 @@
         </p:nvSpPr>
         <p:spPr>
           <a:xfrm>
-            <a:off x="4086225" y="1332533"/>
-            <a:ext cx="857250" cy="273248"/>
+            <a:off x="3703615" y="1343905"/>
+            <a:ext cx="1333571" cy="229999"/>
           </a:xfrm>
           <a:prstGeom prst="rect">
             <a:avLst/>
@@ -6371,7 +6403,23 @@
                   <a:srgbClr val="0047AB"/>
                 </a:solidFill>
               </a:rPr>
-              <a:t>P(H|D)</a:t>
+              <a:t>P(</a:t>
+            </a:r>
+            <a:r>
+              <a:rPr lang="en-US" sz="1397" b="1" i="1" dirty="0" err="1">
+                <a:solidFill>
+                  <a:srgbClr val="0047AB"/>
+                </a:solidFill>
+              </a:rPr>
+              <a:t>target|positive</a:t>
+            </a:r>
+            <a:r>
+              <a:rPr lang="en-US" sz="1397" b="1" i="1" dirty="0">
+                <a:solidFill>
+                  <a:srgbClr val="0047AB"/>
+                </a:solidFill>
+              </a:rPr>
+              <a:t>)</a:t>
             </a:r>
             <a:endParaRPr lang="en-US" sz="1397" dirty="0"/>
           </a:p>
@@ -6386,7 +6434,7 @@
         <p:spPr>
           <a:xfrm>
             <a:off x="5086350" y="1395040"/>
-            <a:ext cx="3629025" cy="194667"/>
+            <a:ext cx="2204130" cy="168059"/>
           </a:xfrm>
           <a:prstGeom prst="rect">
             <a:avLst/>
@@ -6412,7 +6460,7 @@
                   <a:srgbClr val="000000"/>
                 </a:solidFill>
               </a:rPr>
-              <a:t>Posterior</a:t>
+              <a:t>Posterior / Positive Predictive Value (PPV)</a:t>
             </a:r>
             <a:endParaRPr lang="en-US" sz="987" dirty="0"/>
           </a:p>
@@ -6467,8 +6515,8 @@
         </p:nvSpPr>
         <p:spPr>
           <a:xfrm>
-            <a:off x="4086225" y="1964029"/>
-            <a:ext cx="857250" cy="273248"/>
+            <a:off x="3689775" y="1986184"/>
+            <a:ext cx="1333571" cy="229999"/>
           </a:xfrm>
           <a:prstGeom prst="rect">
             <a:avLst/>
@@ -6494,7 +6542,23 @@
                   <a:srgbClr val="0047AB"/>
                 </a:solidFill>
               </a:rPr>
-              <a:t>P(D|H)</a:t>
+              <a:t>P(</a:t>
+            </a:r>
+            <a:r>
+              <a:rPr lang="en-US" sz="1397" b="1" i="1" dirty="0" err="1">
+                <a:solidFill>
+                  <a:srgbClr val="0047AB"/>
+                </a:solidFill>
+              </a:rPr>
+              <a:t>positive|target</a:t>
+            </a:r>
+            <a:r>
+              <a:rPr lang="en-US" sz="1397" b="1" i="1" dirty="0">
+                <a:solidFill>
+                  <a:srgbClr val="0047AB"/>
+                </a:solidFill>
+              </a:rPr>
+              <a:t>)</a:t>
             </a:r>
             <a:endParaRPr lang="en-US" sz="1397" dirty="0"/>
           </a:p>
@@ -6509,7 +6573,7 @@
         <p:spPr>
           <a:xfrm>
             <a:off x="5086350" y="2026537"/>
-            <a:ext cx="3629025" cy="194667"/>
+            <a:ext cx="2393284" cy="168059"/>
           </a:xfrm>
           <a:prstGeom prst="rect">
             <a:avLst/>
@@ -6535,7 +6599,7 @@
                   <a:srgbClr val="000000"/>
                 </a:solidFill>
               </a:rPr>
-              <a:t>Likelihood</a:t>
+              <a:t>Likelihood / sensitivity of the target detection</a:t>
             </a:r>
             <a:endParaRPr lang="en-US" sz="987" dirty="0"/>
           </a:p>
@@ -6590,8 +6654,8 @@
         </p:nvSpPr>
         <p:spPr>
           <a:xfrm>
-            <a:off x="4086225" y="2595525"/>
-            <a:ext cx="857250" cy="273248"/>
+            <a:off x="4292119" y="2591978"/>
+            <a:ext cx="668324" cy="229999"/>
           </a:xfrm>
           <a:prstGeom prst="rect">
             <a:avLst/>
@@ -6617,7 +6681,7 @@
                   <a:srgbClr val="0047AB"/>
                 </a:solidFill>
               </a:rPr>
-              <a:t>P(H)</a:t>
+              <a:t>P(target)</a:t>
             </a:r>
             <a:endParaRPr lang="en-US" sz="1397" dirty="0"/>
           </a:p>
@@ -6632,7 +6696,7 @@
         <p:spPr>
           <a:xfrm>
             <a:off x="5086350" y="2658033"/>
-            <a:ext cx="3629025" cy="194667"/>
+            <a:ext cx="3388748" cy="168059"/>
           </a:xfrm>
           <a:prstGeom prst="rect">
             <a:avLst/>
@@ -6658,7 +6722,7 @@
                   <a:srgbClr val="000000"/>
                 </a:solidFill>
               </a:rPr>
-              <a:t>Prior</a:t>
+              <a:t>Prior / prevalence = fraction of protein whose expression change</a:t>
             </a:r>
             <a:endParaRPr lang="en-US" sz="987" dirty="0"/>
           </a:p>
@@ -6713,8 +6777,8 @@
         </p:nvSpPr>
         <p:spPr>
           <a:xfrm>
-            <a:off x="4086225" y="3227022"/>
-            <a:ext cx="857250" cy="273248"/>
+            <a:off x="4210637" y="3230117"/>
+            <a:ext cx="787075" cy="229999"/>
           </a:xfrm>
           <a:prstGeom prst="rect">
             <a:avLst/>
@@ -6740,7 +6804,7 @@
                   <a:srgbClr val="0047AB"/>
                 </a:solidFill>
               </a:rPr>
-              <a:t>P(D)</a:t>
+              <a:t>P(positive)</a:t>
             </a:r>
             <a:endParaRPr lang="en-US" sz="1397" dirty="0"/>
           </a:p>
@@ -6755,7 +6819,7 @@
         <p:spPr>
           <a:xfrm>
             <a:off x="5086350" y="3289529"/>
-            <a:ext cx="3629025" cy="194667"/>
+            <a:ext cx="3313408" cy="168059"/>
           </a:xfrm>
           <a:prstGeom prst="rect">
             <a:avLst/>
@@ -6781,7 +6845,7 @@
                   <a:srgbClr val="000000"/>
                 </a:solidFill>
               </a:rPr>
-              <a:t>Marginal</a:t>
+              <a:t>Marginal / fraction of proteins change detected (correct or not)</a:t>
             </a:r>
             <a:endParaRPr lang="en-US" sz="987" dirty="0"/>
           </a:p>
@@ -6919,18 +6983,20 @@
               </a:ext>
             </a:extLst>
           </p:cNvPr>
-          <p:cNvCxnSpPr/>
+          <p:cNvCxnSpPr>
+            <a:cxnSpLocks/>
+          </p:cNvCxnSpPr>
           <p:nvPr/>
         </p:nvCxnSpPr>
         <p:spPr>
           <a:xfrm>
-            <a:off x="764498" y="3123605"/>
-            <a:ext cx="2158584" cy="0"/>
+            <a:off x="428625" y="3123605"/>
+            <a:ext cx="2791571" cy="0"/>
           </a:xfrm>
           <a:prstGeom prst="line">
             <a:avLst/>
           </a:prstGeom>
-          <a:ln w="38100">
+          <a:ln w="28575">
             <a:solidFill>
               <a:schemeClr val="bg1"/>
             </a:solidFill>
@@ -6951,6 +7017,53 @@
           </a:fontRef>
         </p:style>
       </p:cxnSp>
+      <p:sp>
+        <p:nvSpPr>
+          <p:cNvPr id="28" name="Text 21">
+            <a:extLst>
+              <a:ext uri="{FF2B5EF4-FFF2-40B4-BE49-F238E27FC236}">
+                <a16:creationId xmlns:a16="http://schemas.microsoft.com/office/drawing/2014/main" id="{F91D5F6C-67D9-5B82-D86B-91282098B1EB}"/>
+              </a:ext>
+            </a:extLst>
+          </p:cNvPr>
+          <p:cNvSpPr/>
+          <p:nvPr/>
+        </p:nvSpPr>
+        <p:spPr>
+          <a:xfrm>
+            <a:off x="3762075" y="962492"/>
+            <a:ext cx="3265125" cy="200376"/>
+          </a:xfrm>
+          <a:prstGeom prst="rect">
+            <a:avLst/>
+          </a:prstGeom>
+          <a:noFill/>
+          <a:ln/>
+        </p:spPr>
+        <p:txBody>
+          <a:bodyPr wrap="square" lIns="0" tIns="0" rIns="0" bIns="0" rtlCol="0" anchor="t">
+            <a:spAutoFit/>
+          </a:bodyPr>
+          <a:lstStyle/>
+          <a:p>
+            <a:pPr marL="0" indent="0" algn="l">
+              <a:lnSpc>
+                <a:spcPts val="1700"/>
+              </a:lnSpc>
+              <a:buNone/>
+            </a:pPr>
+            <a:r>
+              <a:rPr lang="en-US" sz="1090" b="1" dirty="0">
+                <a:solidFill>
+                  <a:srgbClr val="333333"/>
+                </a:solidFill>
+              </a:rPr>
+              <a:t>Target here is a protein that is over- or under-expressed</a:t>
+            </a:r>
+            <a:endParaRPr lang="en-US" sz="1090" dirty="0"/>
+          </a:p>
+        </p:txBody>
+      </p:sp>
     </p:spTree>
   </p:cSld>
   <p:clrMapOvr>
@@ -7512,7 +7625,7 @@
         <p:spPr>
           <a:xfrm>
             <a:off x="342900" y="4015457"/>
-            <a:ext cx="3470551" cy="800100"/>
+            <a:ext cx="3470551" cy="599780"/>
           </a:xfrm>
           <a:prstGeom prst="rect">
             <a:avLst/>
@@ -7538,7 +7651,7 @@
                   <a:srgbClr val="333333"/>
                 </a:solidFill>
               </a:rPr>
-              <a:t>"In proteomics, if only 5% of proteins are truly changing, standard p-value thresholds will flood your results with noise. You need stricter controls (low FDR)."</a:t>
+              <a:t>"In proteomics, if only 1% of proteins are truly changing, standard p-value thresholds will flood your results with noise. You need stricter controls (low FDR)."</a:t>
             </a:r>
             <a:endParaRPr lang="en-US" sz="1050" dirty="0"/>
           </a:p>
@@ -18545,6 +18658,562 @@
 
 <file path=ppt/slides/slide6.xml><?xml version="1.0" encoding="utf-8"?>
 <p:sld xmlns:a="http://schemas.openxmlformats.org/drawingml/2006/main" xmlns:r="http://schemas.openxmlformats.org/officeDocument/2006/relationships" xmlns:p="http://schemas.openxmlformats.org/presentationml/2006/main">
+  <p:cSld name="Slide 6">
+    <p:spTree>
+      <p:nvGrpSpPr>
+        <p:cNvPr id="1" name=""/>
+        <p:cNvGrpSpPr/>
+        <p:nvPr/>
+      </p:nvGrpSpPr>
+      <p:grpSpPr>
+        <a:xfrm>
+          <a:off x="0" y="0"/>
+          <a:ext cx="0" cy="0"/>
+          <a:chOff x="0" y="0"/>
+          <a:chExt cx="0" cy="0"/>
+        </a:xfrm>
+      </p:grpSpPr>
+      <p:pic>
+        <p:nvPicPr>
+          <p:cNvPr id="2" name="Image 0" descr="preencoded.png"/>
+          <p:cNvPicPr>
+            <a:picLocks noChangeAspect="1"/>
+          </p:cNvPicPr>
+          <p:nvPr/>
+        </p:nvPicPr>
+        <p:blipFill>
+          <a:blip r:embed="rId3"/>
+          <a:stretch>
+            <a:fillRect/>
+          </a:stretch>
+        </p:blipFill>
+        <p:spPr>
+          <a:xfrm>
+            <a:off x="0" y="0"/>
+            <a:ext cx="9144000" cy="5143500"/>
+          </a:xfrm>
+          <a:prstGeom prst="rect">
+            <a:avLst/>
+          </a:prstGeom>
+        </p:spPr>
+      </p:pic>
+      <p:sp>
+        <p:nvSpPr>
+          <p:cNvPr id="3" name="Shape 0"/>
+          <p:cNvSpPr/>
+          <p:nvPr/>
+        </p:nvSpPr>
+        <p:spPr>
+          <a:xfrm>
+            <a:off x="0" y="285750"/>
+            <a:ext cx="9144000" cy="571500"/>
+          </a:xfrm>
+          <a:prstGeom prst="rect">
+            <a:avLst/>
+          </a:prstGeom>
+          <a:solidFill>
+            <a:srgbClr val="000000">
+              <a:alpha val="0"/>
+            </a:srgbClr>
+          </a:solidFill>
+          <a:ln/>
+        </p:spPr>
+        <p:txBody>
+          <a:bodyPr/>
+          <a:lstStyle/>
+          <a:p>
+            <a:endParaRPr lang="fr-FR"/>
+          </a:p>
+        </p:txBody>
+      </p:sp>
+      <p:sp>
+        <p:nvSpPr>
+          <p:cNvPr id="4" name="Shape 1"/>
+          <p:cNvSpPr/>
+          <p:nvPr/>
+        </p:nvSpPr>
+        <p:spPr>
+          <a:xfrm>
+            <a:off x="0" y="828675"/>
+            <a:ext cx="9144000" cy="28575"/>
+          </a:xfrm>
+          <a:prstGeom prst="rect">
+            <a:avLst/>
+          </a:prstGeom>
+          <a:solidFill>
+            <a:srgbClr val="000000"/>
+          </a:solidFill>
+          <a:ln/>
+        </p:spPr>
+        <p:txBody>
+          <a:bodyPr/>
+          <a:lstStyle/>
+          <a:p>
+            <a:endParaRPr lang="fr-FR"/>
+          </a:p>
+        </p:txBody>
+      </p:sp>
+      <p:sp>
+        <p:nvSpPr>
+          <p:cNvPr id="5" name="Text 2"/>
+          <p:cNvSpPr/>
+          <p:nvPr/>
+        </p:nvSpPr>
+        <p:spPr>
+          <a:xfrm>
+            <a:off x="428625" y="454521"/>
+            <a:ext cx="2599599" cy="233958"/>
+          </a:xfrm>
+          <a:prstGeom prst="rect">
+            <a:avLst/>
+          </a:prstGeom>
+          <a:noFill/>
+          <a:ln/>
+        </p:spPr>
+        <p:txBody>
+          <a:bodyPr wrap="none" lIns="0" tIns="0" rIns="0" bIns="0" rtlCol="0" anchor="t">
+            <a:spAutoFit/>
+          </a:bodyPr>
+          <a:lstStyle/>
+          <a:p>
+            <a:pPr marL="0" indent="0" algn="l">
+              <a:lnSpc>
+                <a:spcPts val="1600"/>
+              </a:lnSpc>
+              <a:buNone/>
+            </a:pPr>
+            <a:r>
+              <a:rPr lang="en-US" sz="1193" b="1" kern="0" spc="1" dirty="0">
+                <a:solidFill>
+                  <a:srgbClr val="333333"/>
+                </a:solidFill>
+              </a:rPr>
+              <a:t>The Normal Distribution</a:t>
+            </a:r>
+            <a:endParaRPr lang="en-US" sz="1193" dirty="0"/>
+          </a:p>
+        </p:txBody>
+      </p:sp>
+      <p:sp>
+        <p:nvSpPr>
+          <p:cNvPr id="6" name="Text 3"/>
+          <p:cNvSpPr/>
+          <p:nvPr/>
+        </p:nvSpPr>
+        <p:spPr>
+          <a:xfrm>
+            <a:off x="285750" y="1000125"/>
+            <a:ext cx="4000500" cy="891490"/>
+          </a:xfrm>
+          <a:prstGeom prst="rect">
+            <a:avLst/>
+          </a:prstGeom>
+          <a:noFill/>
+          <a:ln/>
+        </p:spPr>
+        <p:txBody>
+          <a:bodyPr wrap="square" lIns="0" tIns="0" rIns="0" bIns="0" rtlCol="0" anchor="t">
+            <a:spAutoFit/>
+          </a:bodyPr>
+          <a:lstStyle/>
+          <a:p>
+            <a:pPr marL="0" indent="0" algn="l">
+              <a:lnSpc>
+                <a:spcPts val="2300"/>
+              </a:lnSpc>
+              <a:buNone/>
+            </a:pPr>
+            <a:r>
+              <a:rPr lang="en-US" sz="1602" b="1" dirty="0">
+                <a:solidFill>
+                  <a:srgbClr val="0047AB"/>
+                </a:solidFill>
+              </a:rPr>
+              <a:t>The foundation for statistical testing, characterized by Mean (μ) and Standard Deviation (σ).</a:t>
+            </a:r>
+            <a:endParaRPr lang="en-US" sz="1602" dirty="0"/>
+          </a:p>
+        </p:txBody>
+      </p:sp>
+      <p:sp>
+        <p:nvSpPr>
+          <p:cNvPr id="7" name="Text 4"/>
+          <p:cNvSpPr/>
+          <p:nvPr/>
+        </p:nvSpPr>
+        <p:spPr>
+          <a:xfrm>
+            <a:off x="457200" y="1988055"/>
+            <a:ext cx="1208745" cy="214313"/>
+          </a:xfrm>
+          <a:prstGeom prst="rect">
+            <a:avLst/>
+          </a:prstGeom>
+          <a:noFill/>
+          <a:ln/>
+        </p:spPr>
+        <p:txBody>
+          <a:bodyPr wrap="none" lIns="0" tIns="0" rIns="0" bIns="0" rtlCol="0" anchor="t">
+            <a:spAutoFit/>
+          </a:bodyPr>
+          <a:lstStyle/>
+          <a:p>
+            <a:pPr marL="0" indent="0" algn="l">
+              <a:lnSpc>
+                <a:spcPts val="1900"/>
+              </a:lnSpc>
+              <a:buNone/>
+            </a:pPr>
+            <a:r>
+              <a:rPr lang="en-US" sz="1090" b="1" dirty="0">
+                <a:solidFill>
+                  <a:srgbClr val="000000"/>
+                </a:solidFill>
+              </a:rPr>
+              <a:t>68-95-99.7 Rule:</a:t>
+            </a:r>
+            <a:endParaRPr lang="en-US" sz="1090" dirty="0"/>
+          </a:p>
+        </p:txBody>
+      </p:sp>
+      <p:sp>
+        <p:nvSpPr>
+          <p:cNvPr id="8" name="Text 5"/>
+          <p:cNvSpPr/>
+          <p:nvPr/>
+        </p:nvSpPr>
+        <p:spPr>
+          <a:xfrm>
+            <a:off x="457200" y="1988055"/>
+            <a:ext cx="3520473" cy="465640"/>
+          </a:xfrm>
+          <a:prstGeom prst="rect">
+            <a:avLst/>
+          </a:prstGeom>
+          <a:noFill/>
+          <a:ln/>
+        </p:spPr>
+        <p:txBody>
+          <a:bodyPr wrap="square" lIns="0" tIns="0" rIns="0" bIns="0" rtlCol="0" anchor="t">
+            <a:spAutoFit/>
+          </a:bodyPr>
+          <a:lstStyle/>
+          <a:p>
+            <a:pPr marL="0" indent="0" algn="l">
+              <a:lnSpc>
+                <a:spcPts val="1900"/>
+              </a:lnSpc>
+              <a:buNone/>
+            </a:pPr>
+            <a:endParaRPr lang="en-US" sz="1159" dirty="0">
+              <a:solidFill>
+                <a:srgbClr val="333333"/>
+              </a:solidFill>
+            </a:endParaRPr>
+          </a:p>
+          <a:p>
+            <a:pPr marL="0" indent="0" algn="l">
+              <a:lnSpc>
+                <a:spcPts val="1900"/>
+              </a:lnSpc>
+              <a:buNone/>
+            </a:pPr>
+            <a:r>
+              <a:rPr lang="en-US" sz="1159" dirty="0">
+                <a:solidFill>
+                  <a:srgbClr val="333333"/>
+                </a:solidFill>
+              </a:rPr>
+              <a:t>Data falls within 1σ, 2σ, and 3σ respectively.</a:t>
+            </a:r>
+            <a:endParaRPr lang="en-US" sz="1159" dirty="0"/>
+          </a:p>
+        </p:txBody>
+      </p:sp>
+      <p:sp>
+        <p:nvSpPr>
+          <p:cNvPr id="9" name="Text 6"/>
+          <p:cNvSpPr/>
+          <p:nvPr/>
+        </p:nvSpPr>
+        <p:spPr>
+          <a:xfrm>
+            <a:off x="285750" y="2534552"/>
+            <a:ext cx="4000500" cy="471488"/>
+          </a:xfrm>
+          <a:prstGeom prst="rect">
+            <a:avLst/>
+          </a:prstGeom>
+          <a:noFill/>
+          <a:ln/>
+        </p:spPr>
+        <p:txBody>
+          <a:bodyPr wrap="square" lIns="170053" tIns="0" rIns="0" bIns="0" rtlCol="0" anchor="t">
+            <a:spAutoFit/>
+          </a:bodyPr>
+          <a:lstStyle/>
+          <a:p>
+            <a:pPr marL="0" indent="0" algn="l">
+              <a:lnSpc>
+                <a:spcPts val="1900"/>
+              </a:lnSpc>
+              <a:buNone/>
+            </a:pPr>
+            <a:r>
+              <a:rPr lang="en-US" sz="1159" dirty="0">
+                <a:solidFill>
+                  <a:srgbClr val="333333"/>
+                </a:solidFill>
+              </a:rPr>
+              <a:t>Many biological measurements, including protein abundance, approximate this distribution (or the log of the measurements).</a:t>
+            </a:r>
+            <a:endParaRPr lang="en-US" sz="1159" dirty="0"/>
+          </a:p>
+        </p:txBody>
+      </p:sp>
+      <p:sp>
+        <p:nvSpPr>
+          <p:cNvPr id="10" name="Text 7"/>
+          <p:cNvSpPr/>
+          <p:nvPr/>
+        </p:nvSpPr>
+        <p:spPr>
+          <a:xfrm>
+            <a:off x="285750" y="3091765"/>
+            <a:ext cx="4000500" cy="471488"/>
+          </a:xfrm>
+          <a:prstGeom prst="rect">
+            <a:avLst/>
+          </a:prstGeom>
+          <a:noFill/>
+          <a:ln/>
+        </p:spPr>
+        <p:txBody>
+          <a:bodyPr wrap="square" lIns="170053" tIns="0" rIns="0" bIns="0" rtlCol="0" anchor="t">
+            <a:spAutoFit/>
+          </a:bodyPr>
+          <a:lstStyle/>
+          <a:p>
+            <a:pPr marL="0" indent="0" algn="l">
+              <a:lnSpc>
+                <a:spcPts val="1900"/>
+              </a:lnSpc>
+              <a:buNone/>
+            </a:pPr>
+            <a:r>
+              <a:rPr lang="en-US" sz="1159" dirty="0">
+                <a:solidFill>
+                  <a:srgbClr val="333333"/>
+                </a:solidFill>
+              </a:rPr>
+              <a:t>Essential for modeling noise and calculating probabilities in proteomics.</a:t>
+            </a:r>
+            <a:endParaRPr lang="en-US" sz="1159" dirty="0"/>
+          </a:p>
+        </p:txBody>
+      </p:sp>
+      <p:sp>
+        <p:nvSpPr>
+          <p:cNvPr id="11" name="Shape 8"/>
+          <p:cNvSpPr/>
+          <p:nvPr/>
+        </p:nvSpPr>
+        <p:spPr>
+          <a:xfrm>
+            <a:off x="285750" y="3734702"/>
+            <a:ext cx="4000500" cy="943673"/>
+          </a:xfrm>
+          <a:prstGeom prst="rect">
+            <a:avLst/>
+          </a:prstGeom>
+          <a:solidFill>
+            <a:srgbClr val="333333"/>
+          </a:solidFill>
+          <a:ln/>
+        </p:spPr>
+        <p:txBody>
+          <a:bodyPr/>
+          <a:lstStyle/>
+          <a:p>
+            <a:endParaRPr lang="fr-FR"/>
+          </a:p>
+        </p:txBody>
+      </p:sp>
+      <p:sp>
+        <p:nvSpPr>
+          <p:cNvPr id="12" name="Text 9"/>
+          <p:cNvSpPr/>
+          <p:nvPr/>
+        </p:nvSpPr>
+        <p:spPr>
+          <a:xfrm>
+            <a:off x="371475" y="3820427"/>
+            <a:ext cx="3829050" cy="175022"/>
+          </a:xfrm>
+          <a:prstGeom prst="rect">
+            <a:avLst/>
+          </a:prstGeom>
+          <a:noFill/>
+          <a:ln/>
+        </p:spPr>
+        <p:txBody>
+          <a:bodyPr wrap="none" lIns="0" tIns="0" rIns="0" bIns="0" rtlCol="0" anchor="t">
+            <a:spAutoFit/>
+          </a:bodyPr>
+          <a:lstStyle/>
+          <a:p>
+            <a:pPr marL="0" indent="0" algn="l">
+              <a:lnSpc>
+                <a:spcPts val="1200"/>
+              </a:lnSpc>
+              <a:buNone/>
+            </a:pPr>
+            <a:r>
+              <a:rPr lang="en-US" sz="885" b="1" dirty="0">
+                <a:solidFill>
+                  <a:srgbClr val="FF3B30"/>
+                </a:solidFill>
+              </a:rPr>
+              <a:t>Central Limit Theorem</a:t>
+            </a:r>
+            <a:endParaRPr lang="en-US" sz="885" dirty="0"/>
+          </a:p>
+        </p:txBody>
+      </p:sp>
+      <p:sp>
+        <p:nvSpPr>
+          <p:cNvPr id="13" name="Text 10"/>
+          <p:cNvSpPr/>
+          <p:nvPr/>
+        </p:nvSpPr>
+        <p:spPr>
+          <a:xfrm>
+            <a:off x="371475" y="4052599"/>
+            <a:ext cx="3829050" cy="540051"/>
+          </a:xfrm>
+          <a:prstGeom prst="rect">
+            <a:avLst/>
+          </a:prstGeom>
+          <a:noFill/>
+          <a:ln/>
+        </p:spPr>
+        <p:txBody>
+          <a:bodyPr wrap="square" lIns="0" tIns="0" rIns="0" bIns="0" rtlCol="0" anchor="t">
+            <a:spAutoFit/>
+          </a:bodyPr>
+          <a:lstStyle/>
+          <a:p>
+            <a:pPr marL="0" indent="0" algn="l">
+              <a:lnSpc>
+                <a:spcPts val="1400"/>
+              </a:lnSpc>
+              <a:buNone/>
+            </a:pPr>
+            <a:r>
+              <a:rPr lang="en-US" sz="942" dirty="0">
+                <a:solidFill>
+                  <a:srgbClr val="FFFFFF"/>
+                </a:solidFill>
+              </a:rPr>
+              <a:t>Sample means follow a normal distribution regardless of the underlying data distribution, enabling robust statistical inference.</a:t>
+            </a:r>
+            <a:endParaRPr lang="en-US" sz="942" dirty="0"/>
+          </a:p>
+        </p:txBody>
+      </p:sp>
+      <p:sp>
+        <p:nvSpPr>
+          <p:cNvPr id="14" name="Shape 11"/>
+          <p:cNvSpPr/>
+          <p:nvPr/>
+        </p:nvSpPr>
+        <p:spPr>
+          <a:xfrm>
+            <a:off x="4572000" y="857250"/>
+            <a:ext cx="4572000" cy="4286250"/>
+          </a:xfrm>
+          <a:prstGeom prst="rect">
+            <a:avLst/>
+          </a:prstGeom>
+          <a:solidFill>
+            <a:srgbClr val="F5F5F5"/>
+          </a:solidFill>
+          <a:ln/>
+        </p:spPr>
+        <p:txBody>
+          <a:bodyPr/>
+          <a:lstStyle/>
+          <a:p>
+            <a:endParaRPr lang="fr-FR"/>
+          </a:p>
+        </p:txBody>
+      </p:sp>
+      <p:sp>
+        <p:nvSpPr>
+          <p:cNvPr id="15" name="Shape 12"/>
+          <p:cNvSpPr/>
+          <p:nvPr/>
+        </p:nvSpPr>
+        <p:spPr>
+          <a:xfrm>
+            <a:off x="4714875" y="1000125"/>
+            <a:ext cx="4286250" cy="4000500"/>
+          </a:xfrm>
+          <a:prstGeom prst="rect">
+            <a:avLst/>
+          </a:prstGeom>
+          <a:solidFill>
+            <a:srgbClr val="FFFFFF"/>
+          </a:solidFill>
+          <a:ln w="9144">
+            <a:solidFill>
+              <a:srgbClr val="DDDDDD"/>
+            </a:solidFill>
+            <a:prstDash val="solid"/>
+          </a:ln>
+        </p:spPr>
+        <p:txBody>
+          <a:bodyPr/>
+          <a:lstStyle/>
+          <a:p>
+            <a:endParaRPr lang="fr-FR"/>
+          </a:p>
+        </p:txBody>
+      </p:sp>
+      <p:pic>
+        <p:nvPicPr>
+          <p:cNvPr id="16" name="Image 1" descr="preencoded.png"/>
+          <p:cNvPicPr>
+            <a:picLocks noChangeAspect="1"/>
+          </p:cNvPicPr>
+          <p:nvPr/>
+        </p:nvPicPr>
+        <p:blipFill>
+          <a:blip r:embed="rId4"/>
+          <a:stretch>
+            <a:fillRect/>
+          </a:stretch>
+        </p:blipFill>
+        <p:spPr>
+          <a:xfrm>
+            <a:off x="4714875" y="1393031"/>
+            <a:ext cx="4286250" cy="3214688"/>
+          </a:xfrm>
+          <a:prstGeom prst="rect">
+            <a:avLst/>
+          </a:prstGeom>
+        </p:spPr>
+      </p:pic>
+    </p:spTree>
+  </p:cSld>
+  <p:clrMapOvr>
+    <a:masterClrMapping/>
+  </p:clrMapOvr>
+</p:sld>
+</file>
+
+<file path=ppt/slides/slide7.xml><?xml version="1.0" encoding="utf-8"?>
+<p:sld xmlns:a="http://schemas.openxmlformats.org/drawingml/2006/main" xmlns:r="http://schemas.openxmlformats.org/officeDocument/2006/relationships" xmlns:p="http://schemas.openxmlformats.org/presentationml/2006/main">
   <p:cSld name="Slide 5">
     <p:spTree>
       <p:nvGrpSpPr>
@@ -19386,562 +20055,6 @@
           </a:p>
         </p:txBody>
       </p:sp>
-    </p:spTree>
-  </p:cSld>
-  <p:clrMapOvr>
-    <a:masterClrMapping/>
-  </p:clrMapOvr>
-</p:sld>
-</file>
-
-<file path=ppt/slides/slide7.xml><?xml version="1.0" encoding="utf-8"?>
-<p:sld xmlns:a="http://schemas.openxmlformats.org/drawingml/2006/main" xmlns:r="http://schemas.openxmlformats.org/officeDocument/2006/relationships" xmlns:p="http://schemas.openxmlformats.org/presentationml/2006/main">
-  <p:cSld name="Slide 6">
-    <p:spTree>
-      <p:nvGrpSpPr>
-        <p:cNvPr id="1" name=""/>
-        <p:cNvGrpSpPr/>
-        <p:nvPr/>
-      </p:nvGrpSpPr>
-      <p:grpSpPr>
-        <a:xfrm>
-          <a:off x="0" y="0"/>
-          <a:ext cx="0" cy="0"/>
-          <a:chOff x="0" y="0"/>
-          <a:chExt cx="0" cy="0"/>
-        </a:xfrm>
-      </p:grpSpPr>
-      <p:pic>
-        <p:nvPicPr>
-          <p:cNvPr id="2" name="Image 0" descr="preencoded.png"/>
-          <p:cNvPicPr>
-            <a:picLocks noChangeAspect="1"/>
-          </p:cNvPicPr>
-          <p:nvPr/>
-        </p:nvPicPr>
-        <p:blipFill>
-          <a:blip r:embed="rId3"/>
-          <a:stretch>
-            <a:fillRect/>
-          </a:stretch>
-        </p:blipFill>
-        <p:spPr>
-          <a:xfrm>
-            <a:off x="0" y="0"/>
-            <a:ext cx="9144000" cy="5143500"/>
-          </a:xfrm>
-          <a:prstGeom prst="rect">
-            <a:avLst/>
-          </a:prstGeom>
-        </p:spPr>
-      </p:pic>
-      <p:sp>
-        <p:nvSpPr>
-          <p:cNvPr id="3" name="Shape 0"/>
-          <p:cNvSpPr/>
-          <p:nvPr/>
-        </p:nvSpPr>
-        <p:spPr>
-          <a:xfrm>
-            <a:off x="0" y="285750"/>
-            <a:ext cx="9144000" cy="571500"/>
-          </a:xfrm>
-          <a:prstGeom prst="rect">
-            <a:avLst/>
-          </a:prstGeom>
-          <a:solidFill>
-            <a:srgbClr val="000000">
-              <a:alpha val="0"/>
-            </a:srgbClr>
-          </a:solidFill>
-          <a:ln/>
-        </p:spPr>
-        <p:txBody>
-          <a:bodyPr/>
-          <a:lstStyle/>
-          <a:p>
-            <a:endParaRPr lang="fr-FR"/>
-          </a:p>
-        </p:txBody>
-      </p:sp>
-      <p:sp>
-        <p:nvSpPr>
-          <p:cNvPr id="4" name="Shape 1"/>
-          <p:cNvSpPr/>
-          <p:nvPr/>
-        </p:nvSpPr>
-        <p:spPr>
-          <a:xfrm>
-            <a:off x="0" y="828675"/>
-            <a:ext cx="9144000" cy="28575"/>
-          </a:xfrm>
-          <a:prstGeom prst="rect">
-            <a:avLst/>
-          </a:prstGeom>
-          <a:solidFill>
-            <a:srgbClr val="000000"/>
-          </a:solidFill>
-          <a:ln/>
-        </p:spPr>
-        <p:txBody>
-          <a:bodyPr/>
-          <a:lstStyle/>
-          <a:p>
-            <a:endParaRPr lang="fr-FR"/>
-          </a:p>
-        </p:txBody>
-      </p:sp>
-      <p:sp>
-        <p:nvSpPr>
-          <p:cNvPr id="5" name="Text 2"/>
-          <p:cNvSpPr/>
-          <p:nvPr/>
-        </p:nvSpPr>
-        <p:spPr>
-          <a:xfrm>
-            <a:off x="428625" y="454521"/>
-            <a:ext cx="2599599" cy="233958"/>
-          </a:xfrm>
-          <a:prstGeom prst="rect">
-            <a:avLst/>
-          </a:prstGeom>
-          <a:noFill/>
-          <a:ln/>
-        </p:spPr>
-        <p:txBody>
-          <a:bodyPr wrap="none" lIns="0" tIns="0" rIns="0" bIns="0" rtlCol="0" anchor="t">
-            <a:spAutoFit/>
-          </a:bodyPr>
-          <a:lstStyle/>
-          <a:p>
-            <a:pPr marL="0" indent="0" algn="l">
-              <a:lnSpc>
-                <a:spcPts val="1600"/>
-              </a:lnSpc>
-              <a:buNone/>
-            </a:pPr>
-            <a:r>
-              <a:rPr lang="en-US" sz="1193" b="1" kern="0" spc="1" dirty="0">
-                <a:solidFill>
-                  <a:srgbClr val="333333"/>
-                </a:solidFill>
-              </a:rPr>
-              <a:t>The Normal Distribution</a:t>
-            </a:r>
-            <a:endParaRPr lang="en-US" sz="1193" dirty="0"/>
-          </a:p>
-        </p:txBody>
-      </p:sp>
-      <p:sp>
-        <p:nvSpPr>
-          <p:cNvPr id="6" name="Text 3"/>
-          <p:cNvSpPr/>
-          <p:nvPr/>
-        </p:nvSpPr>
-        <p:spPr>
-          <a:xfrm>
-            <a:off x="285750" y="1000125"/>
-            <a:ext cx="4000500" cy="891490"/>
-          </a:xfrm>
-          <a:prstGeom prst="rect">
-            <a:avLst/>
-          </a:prstGeom>
-          <a:noFill/>
-          <a:ln/>
-        </p:spPr>
-        <p:txBody>
-          <a:bodyPr wrap="square" lIns="0" tIns="0" rIns="0" bIns="0" rtlCol="0" anchor="t">
-            <a:spAutoFit/>
-          </a:bodyPr>
-          <a:lstStyle/>
-          <a:p>
-            <a:pPr marL="0" indent="0" algn="l">
-              <a:lnSpc>
-                <a:spcPts val="2300"/>
-              </a:lnSpc>
-              <a:buNone/>
-            </a:pPr>
-            <a:r>
-              <a:rPr lang="en-US" sz="1602" b="1" dirty="0">
-                <a:solidFill>
-                  <a:srgbClr val="0047AB"/>
-                </a:solidFill>
-              </a:rPr>
-              <a:t>The foundation for statistical testing, characterized by Mean (μ) and Standard Deviation (σ).</a:t>
-            </a:r>
-            <a:endParaRPr lang="en-US" sz="1602" dirty="0"/>
-          </a:p>
-        </p:txBody>
-      </p:sp>
-      <p:sp>
-        <p:nvSpPr>
-          <p:cNvPr id="7" name="Text 4"/>
-          <p:cNvSpPr/>
-          <p:nvPr/>
-        </p:nvSpPr>
-        <p:spPr>
-          <a:xfrm>
-            <a:off x="457200" y="1988055"/>
-            <a:ext cx="1208745" cy="214313"/>
-          </a:xfrm>
-          <a:prstGeom prst="rect">
-            <a:avLst/>
-          </a:prstGeom>
-          <a:noFill/>
-          <a:ln/>
-        </p:spPr>
-        <p:txBody>
-          <a:bodyPr wrap="none" lIns="0" tIns="0" rIns="0" bIns="0" rtlCol="0" anchor="t">
-            <a:spAutoFit/>
-          </a:bodyPr>
-          <a:lstStyle/>
-          <a:p>
-            <a:pPr marL="0" indent="0" algn="l">
-              <a:lnSpc>
-                <a:spcPts val="1900"/>
-              </a:lnSpc>
-              <a:buNone/>
-            </a:pPr>
-            <a:r>
-              <a:rPr lang="en-US" sz="1090" b="1" dirty="0">
-                <a:solidFill>
-                  <a:srgbClr val="000000"/>
-                </a:solidFill>
-              </a:rPr>
-              <a:t>68-95-99.7 Rule:</a:t>
-            </a:r>
-            <a:endParaRPr lang="en-US" sz="1090" dirty="0"/>
-          </a:p>
-        </p:txBody>
-      </p:sp>
-      <p:sp>
-        <p:nvSpPr>
-          <p:cNvPr id="8" name="Text 5"/>
-          <p:cNvSpPr/>
-          <p:nvPr/>
-        </p:nvSpPr>
-        <p:spPr>
-          <a:xfrm>
-            <a:off x="457200" y="1988055"/>
-            <a:ext cx="3520473" cy="465640"/>
-          </a:xfrm>
-          <a:prstGeom prst="rect">
-            <a:avLst/>
-          </a:prstGeom>
-          <a:noFill/>
-          <a:ln/>
-        </p:spPr>
-        <p:txBody>
-          <a:bodyPr wrap="square" lIns="0" tIns="0" rIns="0" bIns="0" rtlCol="0" anchor="t">
-            <a:spAutoFit/>
-          </a:bodyPr>
-          <a:lstStyle/>
-          <a:p>
-            <a:pPr marL="0" indent="0" algn="l">
-              <a:lnSpc>
-                <a:spcPts val="1900"/>
-              </a:lnSpc>
-              <a:buNone/>
-            </a:pPr>
-            <a:endParaRPr lang="en-US" sz="1159" dirty="0">
-              <a:solidFill>
-                <a:srgbClr val="333333"/>
-              </a:solidFill>
-            </a:endParaRPr>
-          </a:p>
-          <a:p>
-            <a:pPr marL="0" indent="0" algn="l">
-              <a:lnSpc>
-                <a:spcPts val="1900"/>
-              </a:lnSpc>
-              <a:buNone/>
-            </a:pPr>
-            <a:r>
-              <a:rPr lang="en-US" sz="1159" dirty="0">
-                <a:solidFill>
-                  <a:srgbClr val="333333"/>
-                </a:solidFill>
-              </a:rPr>
-              <a:t>Data falls within 1σ, 2σ, and 3σ respectively.</a:t>
-            </a:r>
-            <a:endParaRPr lang="en-US" sz="1159" dirty="0"/>
-          </a:p>
-        </p:txBody>
-      </p:sp>
-      <p:sp>
-        <p:nvSpPr>
-          <p:cNvPr id="9" name="Text 6"/>
-          <p:cNvSpPr/>
-          <p:nvPr/>
-        </p:nvSpPr>
-        <p:spPr>
-          <a:xfrm>
-            <a:off x="285750" y="2534552"/>
-            <a:ext cx="4000500" cy="471488"/>
-          </a:xfrm>
-          <a:prstGeom prst="rect">
-            <a:avLst/>
-          </a:prstGeom>
-          <a:noFill/>
-          <a:ln/>
-        </p:spPr>
-        <p:txBody>
-          <a:bodyPr wrap="square" lIns="170053" tIns="0" rIns="0" bIns="0" rtlCol="0" anchor="t">
-            <a:spAutoFit/>
-          </a:bodyPr>
-          <a:lstStyle/>
-          <a:p>
-            <a:pPr marL="0" indent="0" algn="l">
-              <a:lnSpc>
-                <a:spcPts val="1900"/>
-              </a:lnSpc>
-              <a:buNone/>
-            </a:pPr>
-            <a:r>
-              <a:rPr lang="en-US" sz="1159" dirty="0">
-                <a:solidFill>
-                  <a:srgbClr val="333333"/>
-                </a:solidFill>
-              </a:rPr>
-              <a:t>Many biological measurements, including protein abundance, approximate this distribution (or the log of the measurements).</a:t>
-            </a:r>
-            <a:endParaRPr lang="en-US" sz="1159" dirty="0"/>
-          </a:p>
-        </p:txBody>
-      </p:sp>
-      <p:sp>
-        <p:nvSpPr>
-          <p:cNvPr id="10" name="Text 7"/>
-          <p:cNvSpPr/>
-          <p:nvPr/>
-        </p:nvSpPr>
-        <p:spPr>
-          <a:xfrm>
-            <a:off x="285750" y="3091765"/>
-            <a:ext cx="4000500" cy="471488"/>
-          </a:xfrm>
-          <a:prstGeom prst="rect">
-            <a:avLst/>
-          </a:prstGeom>
-          <a:noFill/>
-          <a:ln/>
-        </p:spPr>
-        <p:txBody>
-          <a:bodyPr wrap="square" lIns="170053" tIns="0" rIns="0" bIns="0" rtlCol="0" anchor="t">
-            <a:spAutoFit/>
-          </a:bodyPr>
-          <a:lstStyle/>
-          <a:p>
-            <a:pPr marL="0" indent="0" algn="l">
-              <a:lnSpc>
-                <a:spcPts val="1900"/>
-              </a:lnSpc>
-              <a:buNone/>
-            </a:pPr>
-            <a:r>
-              <a:rPr lang="en-US" sz="1159" dirty="0">
-                <a:solidFill>
-                  <a:srgbClr val="333333"/>
-                </a:solidFill>
-              </a:rPr>
-              <a:t>Essential for modeling noise and calculating probabilities in proteomics.</a:t>
-            </a:r>
-            <a:endParaRPr lang="en-US" sz="1159" dirty="0"/>
-          </a:p>
-        </p:txBody>
-      </p:sp>
-      <p:sp>
-        <p:nvSpPr>
-          <p:cNvPr id="11" name="Shape 8"/>
-          <p:cNvSpPr/>
-          <p:nvPr/>
-        </p:nvSpPr>
-        <p:spPr>
-          <a:xfrm>
-            <a:off x="285750" y="3734702"/>
-            <a:ext cx="4000500" cy="943673"/>
-          </a:xfrm>
-          <a:prstGeom prst="rect">
-            <a:avLst/>
-          </a:prstGeom>
-          <a:solidFill>
-            <a:srgbClr val="333333"/>
-          </a:solidFill>
-          <a:ln/>
-        </p:spPr>
-        <p:txBody>
-          <a:bodyPr/>
-          <a:lstStyle/>
-          <a:p>
-            <a:endParaRPr lang="fr-FR"/>
-          </a:p>
-        </p:txBody>
-      </p:sp>
-      <p:sp>
-        <p:nvSpPr>
-          <p:cNvPr id="12" name="Text 9"/>
-          <p:cNvSpPr/>
-          <p:nvPr/>
-        </p:nvSpPr>
-        <p:spPr>
-          <a:xfrm>
-            <a:off x="371475" y="3820427"/>
-            <a:ext cx="3829050" cy="175022"/>
-          </a:xfrm>
-          <a:prstGeom prst="rect">
-            <a:avLst/>
-          </a:prstGeom>
-          <a:noFill/>
-          <a:ln/>
-        </p:spPr>
-        <p:txBody>
-          <a:bodyPr wrap="none" lIns="0" tIns="0" rIns="0" bIns="0" rtlCol="0" anchor="t">
-            <a:spAutoFit/>
-          </a:bodyPr>
-          <a:lstStyle/>
-          <a:p>
-            <a:pPr marL="0" indent="0" algn="l">
-              <a:lnSpc>
-                <a:spcPts val="1200"/>
-              </a:lnSpc>
-              <a:buNone/>
-            </a:pPr>
-            <a:r>
-              <a:rPr lang="en-US" sz="885" b="1" dirty="0">
-                <a:solidFill>
-                  <a:srgbClr val="FF3B30"/>
-                </a:solidFill>
-              </a:rPr>
-              <a:t>Central Limit Theorem</a:t>
-            </a:r>
-            <a:endParaRPr lang="en-US" sz="885" dirty="0"/>
-          </a:p>
-        </p:txBody>
-      </p:sp>
-      <p:sp>
-        <p:nvSpPr>
-          <p:cNvPr id="13" name="Text 10"/>
-          <p:cNvSpPr/>
-          <p:nvPr/>
-        </p:nvSpPr>
-        <p:spPr>
-          <a:xfrm>
-            <a:off x="371475" y="4052599"/>
-            <a:ext cx="3829050" cy="540051"/>
-          </a:xfrm>
-          <a:prstGeom prst="rect">
-            <a:avLst/>
-          </a:prstGeom>
-          <a:noFill/>
-          <a:ln/>
-        </p:spPr>
-        <p:txBody>
-          <a:bodyPr wrap="square" lIns="0" tIns="0" rIns="0" bIns="0" rtlCol="0" anchor="t">
-            <a:spAutoFit/>
-          </a:bodyPr>
-          <a:lstStyle/>
-          <a:p>
-            <a:pPr marL="0" indent="0" algn="l">
-              <a:lnSpc>
-                <a:spcPts val="1400"/>
-              </a:lnSpc>
-              <a:buNone/>
-            </a:pPr>
-            <a:r>
-              <a:rPr lang="en-US" sz="942" dirty="0">
-                <a:solidFill>
-                  <a:srgbClr val="FFFFFF"/>
-                </a:solidFill>
-              </a:rPr>
-              <a:t>Sample means follow a normal distribution regardless of the underlying data distribution, enabling robust statistical inference.</a:t>
-            </a:r>
-            <a:endParaRPr lang="en-US" sz="942" dirty="0"/>
-          </a:p>
-        </p:txBody>
-      </p:sp>
-      <p:sp>
-        <p:nvSpPr>
-          <p:cNvPr id="14" name="Shape 11"/>
-          <p:cNvSpPr/>
-          <p:nvPr/>
-        </p:nvSpPr>
-        <p:spPr>
-          <a:xfrm>
-            <a:off x="4572000" y="857250"/>
-            <a:ext cx="4572000" cy="4286250"/>
-          </a:xfrm>
-          <a:prstGeom prst="rect">
-            <a:avLst/>
-          </a:prstGeom>
-          <a:solidFill>
-            <a:srgbClr val="F5F5F5"/>
-          </a:solidFill>
-          <a:ln/>
-        </p:spPr>
-        <p:txBody>
-          <a:bodyPr/>
-          <a:lstStyle/>
-          <a:p>
-            <a:endParaRPr lang="fr-FR"/>
-          </a:p>
-        </p:txBody>
-      </p:sp>
-      <p:sp>
-        <p:nvSpPr>
-          <p:cNvPr id="15" name="Shape 12"/>
-          <p:cNvSpPr/>
-          <p:nvPr/>
-        </p:nvSpPr>
-        <p:spPr>
-          <a:xfrm>
-            <a:off x="4714875" y="1000125"/>
-            <a:ext cx="4286250" cy="4000500"/>
-          </a:xfrm>
-          <a:prstGeom prst="rect">
-            <a:avLst/>
-          </a:prstGeom>
-          <a:solidFill>
-            <a:srgbClr val="FFFFFF"/>
-          </a:solidFill>
-          <a:ln w="9144">
-            <a:solidFill>
-              <a:srgbClr val="DDDDDD"/>
-            </a:solidFill>
-            <a:prstDash val="solid"/>
-          </a:ln>
-        </p:spPr>
-        <p:txBody>
-          <a:bodyPr/>
-          <a:lstStyle/>
-          <a:p>
-            <a:endParaRPr lang="fr-FR"/>
-          </a:p>
-        </p:txBody>
-      </p:sp>
-      <p:pic>
-        <p:nvPicPr>
-          <p:cNvPr id="16" name="Image 1" descr="preencoded.png"/>
-          <p:cNvPicPr>
-            <a:picLocks noChangeAspect="1"/>
-          </p:cNvPicPr>
-          <p:nvPr/>
-        </p:nvPicPr>
-        <p:blipFill>
-          <a:blip r:embed="rId4"/>
-          <a:stretch>
-            <a:fillRect/>
-          </a:stretch>
-        </p:blipFill>
-        <p:spPr>
-          <a:xfrm>
-            <a:off x="4714875" y="1393031"/>
-            <a:ext cx="4286250" cy="3214688"/>
-          </a:xfrm>
-          <a:prstGeom prst="rect">
-            <a:avLst/>
-          </a:prstGeom>
-        </p:spPr>
-      </p:pic>
     </p:spTree>
   </p:cSld>
   <p:clrMapOvr>

--- a/2026_BePa_Winter_School/bepa2026_stats.pptx
+++ b/2026_BePa_Winter_School/bepa2026_stats.pptx
@@ -13970,10 +13970,10 @@
       </p:sp>
       <p:pic>
         <p:nvPicPr>
-          <p:cNvPr id="16" name="Image 15">
+          <p:cNvPr id="17" name="Image 16" descr="Une image contenant texte, capture d’écran, diagramme, ligne&#10;&#10;Le contenu généré par l’IA peut être incorrect.">
             <a:extLst>
               <a:ext uri="{FF2B5EF4-FFF2-40B4-BE49-F238E27FC236}">
-                <a16:creationId xmlns:a16="http://schemas.microsoft.com/office/drawing/2014/main" id="{9E8CBF7B-2D6F-7CBD-2982-72A0DE164A29}"/>
+                <a16:creationId xmlns:a16="http://schemas.microsoft.com/office/drawing/2014/main" id="{43A2C6A5-9FB2-2DEB-16B5-8C6BD425E0A5}"/>
               </a:ext>
             </a:extLst>
           </p:cNvPr>
@@ -13990,8 +13990,8 @@
         </p:blipFill>
         <p:spPr>
           <a:xfrm>
-            <a:off x="4572000" y="979586"/>
-            <a:ext cx="4101548" cy="3076161"/>
+            <a:off x="4721839" y="1045550"/>
+            <a:ext cx="3900847" cy="2925635"/>
           </a:xfrm>
           <a:prstGeom prst="rect">
             <a:avLst/>
